--- a/assets/powerpoints/module-n1-presenter/B1-d-ou-viens-tu.pptx
+++ b/assets/powerpoints/module-n1-presenter/B1-d-ou-viens-tu.pptx
@@ -10907,7 +10907,43 @@
                 </a:solidFill>
                 <a:latin typeface="Verdana"/>
               </a:rPr>
-              <a:t>Au lieu de répéter toute la question, on dit « &lt;b&gt;et toi ?&lt;/b&gt; » — ou « &lt;b&gt;et vous ?&lt;/b&gt; » si l'on vouvoie. C'est court, c'est poli, et cela fait durer la conversation.</a:t>
+              <a:t>Au lieu de répéter toute la question, on dit « </a:t>
+            </a:r>
+            <a:r>
+              <a:rPr sz="2000" b="1" i="0">
+                <a:solidFill>
+                  <a:srgbClr val="4B4F52"/>
+                </a:solidFill>
+                <a:latin typeface="Verdana"/>
+              </a:rPr>
+              <a:t>et toi ?</a:t>
+            </a:r>
+            <a:r>
+              <a:rPr sz="2000" b="0" i="0">
+                <a:solidFill>
+                  <a:srgbClr val="4B4F52"/>
+                </a:solidFill>
+                <a:latin typeface="Verdana"/>
+              </a:rPr>
+              <a:t> » — ou « </a:t>
+            </a:r>
+            <a:r>
+              <a:rPr sz="2000" b="1" i="0">
+                <a:solidFill>
+                  <a:srgbClr val="4B4F52"/>
+                </a:solidFill>
+                <a:latin typeface="Verdana"/>
+              </a:rPr>
+              <a:t>et vous ?</a:t>
+            </a:r>
+            <a:r>
+              <a:rPr sz="2000" b="0" i="0">
+                <a:solidFill>
+                  <a:srgbClr val="4B4F52"/>
+                </a:solidFill>
+                <a:latin typeface="Verdana"/>
+              </a:rPr>
+              <a:t> » si l'on vouvoie. C'est court, c'est poli, et cela fait durer la conversation.</a:t>
             </a:r>
           </a:p>
         </p:txBody>
